--- a/docs/decks/ShockFlow_AI_overview.pptx
+++ b/docs/decks/ShockFlow_AI_overview.pptx
@@ -2155,24 +2155,24 @@
         </p:nvSpPr>
         <p:spPr>
           <a:xfrm>
-            <a:off x="502920" y="3127248"/>
-            <a:ext cx="5486400" cy="274320"/>
-          </a:xfrm>
-          <a:prstGeom prst="rect">
-            <a:avLst/>
-          </a:prstGeom>
-          <a:noFill/>
-          <a:ln/>
-        </p:spPr>
-        <p:txBody>
-          <a:bodyPr wrap="square" lIns="0" tIns="0" rIns="0" bIns="0" rtlCol="0" anchor="ctr"/>
-          <a:lstStyle/>
-          <a:p>
-            <a:pPr algn="l" indent="0" marL="0">
-              <a:buNone/>
-            </a:pPr>
-            <a:r>
-              <a:rPr lang="en-US" sz="1150" b="1" spc="150" kern="0" dirty="0">
+            <a:off x="457200" y="2889504"/>
+            <a:ext cx="11247120" cy="201168"/>
+          </a:xfrm>
+          <a:prstGeom prst="rect">
+            <a:avLst/>
+          </a:prstGeom>
+          <a:noFill/>
+          <a:ln/>
+        </p:spPr>
+        <p:txBody>
+          <a:bodyPr wrap="square" lIns="0" tIns="0" rIns="0" bIns="0" rtlCol="0" anchor="ctr"/>
+          <a:lstStyle/>
+          <a:p>
+            <a:pPr algn="l" indent="0" marL="0">
+              <a:buNone/>
+            </a:pPr>
+            <a:r>
+              <a:rPr lang="en-US" sz="850" b="1" dirty="0">
                 <a:solidFill>
                   <a:srgbClr val="F5A02B"/>
                 </a:solidFill>
@@ -2180,64 +2180,100 @@
                 <a:ea typeface="Courier New" pitchFamily="34" charset="-122"/>
                 <a:cs typeface="Courier New" pitchFamily="34" charset="-120"/>
               </a:rPr>
-              <a:t>BACKGROUND</a:t>
-            </a:r>
-            <a:pPr algn="l" indent="0" marL="0">
-              <a:buNone/>
-            </a:pPr>
-            <a:r>
-              <a:rPr lang="en-US" sz="1150" spc="150" kern="0" dirty="0">
+              <a:t>용어  </a:t>
+            </a:r>
+            <a:pPr algn="l" indent="0" marL="0">
+              <a:buNone/>
+            </a:pPr>
+            <a:r>
+              <a:rPr lang="en-US" sz="850" dirty="0">
                 <a:solidFill>
                   <a:srgbClr val="7E8DA8"/>
-                </a:solidFill>
-                <a:latin typeface="Courier New" pitchFamily="34" charset="0"/>
-                <a:ea typeface="Courier New" pitchFamily="34" charset="-122"/>
-                <a:cs typeface="Courier New" pitchFamily="34" charset="-120"/>
-              </a:rPr>
-              <a:t>  배경 / 문제</a:t>
-            </a:r>
-            <a:endParaRPr lang="en-US" sz="1150" dirty="0"/>
-          </a:p>
-        </p:txBody>
-      </p:sp>
-      <p:sp>
-        <p:nvSpPr>
-          <p:cNvPr id="35" name="Text 33"/>
-          <p:cNvSpPr/>
-          <p:nvPr/>
-        </p:nvSpPr>
-        <p:spPr>
-          <a:xfrm>
-            <a:off x="502920" y="3438144"/>
-            <a:ext cx="5394960" cy="960120"/>
-          </a:xfrm>
-          <a:prstGeom prst="rect">
-            <a:avLst/>
-          </a:prstGeom>
-          <a:noFill/>
-          <a:ln/>
-        </p:spPr>
-        <p:txBody>
-          <a:bodyPr wrap="square" lIns="0" tIns="0" rIns="0" bIns="0" rtlCol="0" anchor="ctr"/>
-          <a:lstStyle/>
-          <a:p>
-            <a:pPr algn="l" indent="0" marL="0">
-              <a:lnSpc>
-                <a:spcPct val="105000"/>
-              </a:lnSpc>
-              <a:buNone/>
-            </a:pPr>
-            <a:r>
-              <a:rPr lang="en-US" sz="1200" dirty="0">
-                <a:solidFill>
-                  <a:srgbClr val="AEBCD4"/>
                 </a:solidFill>
                 <a:latin typeface="Calibri" pitchFamily="34" charset="0"/>
                 <a:ea typeface="Calibri" pitchFamily="34" charset="-122"/>
                 <a:cs typeface="Calibri" pitchFamily="34" charset="-120"/>
               </a:rPr>
-              <a:t>운영 손실의 대부분은 </a:t>
-            </a:r>
+              <a:t>H3 zone = 동네 블록 단위(육각 격자 res 9, ~170 m) · borough = 뉴욕 자치구(시 행정구역)</a:t>
+            </a:r>
+            <a:endParaRPr lang="en-US" sz="850" dirty="0"/>
+          </a:p>
+        </p:txBody>
+      </p:sp>
+      <p:sp>
+        <p:nvSpPr>
+          <p:cNvPr id="35" name="Text 33"/>
+          <p:cNvSpPr/>
+          <p:nvPr/>
+        </p:nvSpPr>
+        <p:spPr>
+          <a:xfrm>
+            <a:off x="502920" y="3127248"/>
+            <a:ext cx="5486400" cy="274320"/>
+          </a:xfrm>
+          <a:prstGeom prst="rect">
+            <a:avLst/>
+          </a:prstGeom>
+          <a:noFill/>
+          <a:ln/>
+        </p:spPr>
+        <p:txBody>
+          <a:bodyPr wrap="square" lIns="0" tIns="0" rIns="0" bIns="0" rtlCol="0" anchor="ctr"/>
+          <a:lstStyle/>
+          <a:p>
+            <a:pPr algn="l" indent="0" marL="0">
+              <a:buNone/>
+            </a:pPr>
+            <a:r>
+              <a:rPr lang="en-US" sz="1150" b="1" spc="150" kern="0" dirty="0">
+                <a:solidFill>
+                  <a:srgbClr val="F5A02B"/>
+                </a:solidFill>
+                <a:latin typeface="Courier New" pitchFamily="34" charset="0"/>
+                <a:ea typeface="Courier New" pitchFamily="34" charset="-122"/>
+                <a:cs typeface="Courier New" pitchFamily="34" charset="-120"/>
+              </a:rPr>
+              <a:t>BACKGROUND</a:t>
+            </a:r>
+            <a:pPr algn="l" indent="0" marL="0">
+              <a:buNone/>
+            </a:pPr>
+            <a:r>
+              <a:rPr lang="en-US" sz="1150" spc="150" kern="0" dirty="0">
+                <a:solidFill>
+                  <a:srgbClr val="7E8DA8"/>
+                </a:solidFill>
+                <a:latin typeface="Courier New" pitchFamily="34" charset="0"/>
+                <a:ea typeface="Courier New" pitchFamily="34" charset="-122"/>
+                <a:cs typeface="Courier New" pitchFamily="34" charset="-120"/>
+              </a:rPr>
+              <a:t>  배경 / 문제</a:t>
+            </a:r>
+            <a:endParaRPr lang="en-US" sz="1150" dirty="0"/>
+          </a:p>
+        </p:txBody>
+      </p:sp>
+      <p:sp>
+        <p:nvSpPr>
+          <p:cNvPr id="36" name="Text 34"/>
+          <p:cNvSpPr/>
+          <p:nvPr/>
+        </p:nvSpPr>
+        <p:spPr>
+          <a:xfrm>
+            <a:off x="502920" y="3438144"/>
+            <a:ext cx="5394960" cy="960120"/>
+          </a:xfrm>
+          <a:prstGeom prst="rect">
+            <a:avLst/>
+          </a:prstGeom>
+          <a:noFill/>
+          <a:ln/>
+        </p:spPr>
+        <p:txBody>
+          <a:bodyPr wrap="square" lIns="0" tIns="0" rIns="0" bIns="0" rtlCol="0" anchor="ctr"/>
+          <a:lstStyle/>
+          <a:p>
             <a:pPr algn="l" indent="0" marL="0">
               <a:lnSpc>
                 <a:spcPct val="105000"/>
@@ -2245,15 +2281,15 @@
               <a:buNone/>
             </a:pPr>
             <a:r>
-              <a:rPr lang="en-US" sz="1200" b="1" dirty="0">
-                <a:solidFill>
-                  <a:srgbClr val="EEF3FB"/>
+              <a:rPr lang="en-US" sz="1200" dirty="0">
+                <a:solidFill>
+                  <a:srgbClr val="AEBCD4"/>
                 </a:solidFill>
                 <a:latin typeface="Calibri" pitchFamily="34" charset="0"/>
                 <a:ea typeface="Calibri" pitchFamily="34" charset="-122"/>
                 <a:cs typeface="Calibri" pitchFamily="34" charset="-120"/>
               </a:rPr>
-              <a:t>stockout(품절)</a:t>
+              <a:t>운영 손실의 대부분은 </a:t>
             </a:r>
             <a:pPr algn="l" indent="0" marL="0">
               <a:lnSpc>
@@ -2262,15 +2298,15 @@
               <a:buNone/>
             </a:pPr>
             <a:r>
-              <a:rPr lang="en-US" sz="1200" dirty="0">
-                <a:solidFill>
-                  <a:srgbClr val="AEBCD4"/>
+              <a:rPr lang="en-US" sz="1200" b="1" dirty="0">
+                <a:solidFill>
+                  <a:srgbClr val="EEF3FB"/>
                 </a:solidFill>
                 <a:latin typeface="Calibri" pitchFamily="34" charset="0"/>
                 <a:ea typeface="Calibri" pitchFamily="34" charset="-122"/>
                 <a:cs typeface="Calibri" pitchFamily="34" charset="-120"/>
               </a:rPr>
-              <a:t> · </a:t>
+              <a:t>stockout(품절)</a:t>
             </a:r>
             <a:pPr algn="l" indent="0" marL="0">
               <a:lnSpc>
@@ -2279,15 +2315,15 @@
               <a:buNone/>
             </a:pPr>
             <a:r>
-              <a:rPr lang="en-US" sz="1200" b="1" dirty="0">
-                <a:solidFill>
-                  <a:srgbClr val="EEF3FB"/>
+              <a:rPr lang="en-US" sz="1200" dirty="0">
+                <a:solidFill>
+                  <a:srgbClr val="AEBCD4"/>
                 </a:solidFill>
                 <a:latin typeface="Calibri" pitchFamily="34" charset="0"/>
                 <a:ea typeface="Calibri" pitchFamily="34" charset="-122"/>
                 <a:cs typeface="Calibri" pitchFamily="34" charset="-120"/>
               </a:rPr>
-              <a:t>overflow(dock 초과)</a:t>
+              <a:t> · </a:t>
             </a:r>
             <a:pPr algn="l" indent="0" marL="0">
               <a:lnSpc>
@@ -2296,19 +2332,16 @@
               <a:buNone/>
             </a:pPr>
             <a:r>
-              <a:rPr lang="en-US" sz="1200" dirty="0">
-                <a:solidFill>
-                  <a:srgbClr val="AEBCD4"/>
+              <a:rPr lang="en-US" sz="1200" b="1" dirty="0">
+                <a:solidFill>
+                  <a:srgbClr val="EEF3FB"/>
                 </a:solidFill>
                 <a:latin typeface="Calibri" pitchFamily="34" charset="0"/>
                 <a:ea typeface="Calibri" pitchFamily="34" charset="-122"/>
                 <a:cs typeface="Calibri" pitchFamily="34" charset="-120"/>
               </a:rPr>
-              <a:t>에서 발생 — rider 이탈과 rebalancing 트럭 비용.</a:t>
-            </a:r>
-            <a:endParaRPr lang="en-US" sz="1200" dirty="0"/>
-          </a:p>
-          <a:p>
+              <a:t>overflow(dock 초과)</a:t>
+            </a:r>
             <a:pPr algn="l" indent="0" marL="0">
               <a:lnSpc>
                 <a:spcPct val="105000"/>
@@ -2324,8 +2357,11 @@
                 <a:ea typeface="Calibri" pitchFamily="34" charset="-122"/>
                 <a:cs typeface="Calibri" pitchFamily="34" charset="-120"/>
               </a:rPr>
-              <a:t>event·교통장애·날씨 등 </a:t>
-            </a:r>
+              <a:t>에서 발생 — rider 이탈과 rebalancing 트럭 비용.</a:t>
+            </a:r>
+            <a:endParaRPr lang="en-US" sz="1200" dirty="0"/>
+          </a:p>
+          <a:p>
             <a:pPr algn="l" indent="0" marL="0">
               <a:lnSpc>
                 <a:spcPct val="105000"/>
@@ -2333,15 +2369,15 @@
               <a:buNone/>
             </a:pPr>
             <a:r>
-              <a:rPr lang="en-US" sz="1200" b="1" dirty="0">
-                <a:solidFill>
-                  <a:srgbClr val="EEF3FB"/>
+              <a:rPr lang="en-US" sz="1200" dirty="0">
+                <a:solidFill>
+                  <a:srgbClr val="AEBCD4"/>
                 </a:solidFill>
                 <a:latin typeface="Calibri" pitchFamily="34" charset="0"/>
                 <a:ea typeface="Calibri" pitchFamily="34" charset="-122"/>
                 <a:cs typeface="Calibri" pitchFamily="34" charset="-120"/>
               </a:rPr>
-              <a:t>irregular demand shock</a:t>
+              <a:t>event·교통장애·날씨 등 </a:t>
             </a:r>
             <a:pPr algn="l" indent="0" marL="0">
               <a:lnSpc>
@@ -2350,113 +2386,24 @@
               <a:buNone/>
             </a:pPr>
             <a:r>
-              <a:rPr lang="en-US" sz="1200" dirty="0">
-                <a:solidFill>
-                  <a:srgbClr val="AEBCD4"/>
+              <a:rPr lang="en-US" sz="1200" b="1" dirty="0">
+                <a:solidFill>
+                  <a:srgbClr val="EEF3FB"/>
                 </a:solidFill>
                 <a:latin typeface="Calibri" pitchFamily="34" charset="0"/>
                 <a:ea typeface="Calibri" pitchFamily="34" charset="-122"/>
                 <a:cs typeface="Calibri" pitchFamily="34" charset="-120"/>
               </a:rPr>
-              <a:t>에 기존 예측은 취약하고, LLM/뉴스 효과는 검증 없이 과장되기 쉬움.</a:t>
-            </a:r>
-            <a:endParaRPr lang="en-US" sz="1200" dirty="0"/>
-          </a:p>
-        </p:txBody>
-      </p:sp>
-      <p:sp>
-        <p:nvSpPr>
-          <p:cNvPr id="36" name="Text 34"/>
-          <p:cNvSpPr/>
-          <p:nvPr/>
-        </p:nvSpPr>
-        <p:spPr>
-          <a:xfrm>
-            <a:off x="502920" y="4498848"/>
-            <a:ext cx="5486400" cy="274320"/>
-          </a:xfrm>
-          <a:prstGeom prst="rect">
-            <a:avLst/>
-          </a:prstGeom>
-          <a:noFill/>
-          <a:ln/>
-        </p:spPr>
-        <p:txBody>
-          <a:bodyPr wrap="square" lIns="0" tIns="0" rIns="0" bIns="0" rtlCol="0" anchor="ctr"/>
-          <a:lstStyle/>
-          <a:p>
-            <a:pPr algn="l" indent="0" marL="0">
-              <a:buNone/>
-            </a:pPr>
-            <a:r>
-              <a:rPr lang="en-US" sz="1150" b="1" spc="150" kern="0" dirty="0">
-                <a:solidFill>
-                  <a:srgbClr val="F5A02B"/>
-                </a:solidFill>
-                <a:latin typeface="Courier New" pitchFamily="34" charset="0"/>
-                <a:ea typeface="Courier New" pitchFamily="34" charset="-122"/>
-                <a:cs typeface="Courier New" pitchFamily="34" charset="-120"/>
-              </a:rPr>
-              <a:t>BUSINESS</a:t>
-            </a:r>
-            <a:pPr algn="l" indent="0" marL="0">
-              <a:buNone/>
-            </a:pPr>
-            <a:r>
-              <a:rPr lang="en-US" sz="1150" spc="150" kern="0" dirty="0">
-                <a:solidFill>
-                  <a:srgbClr val="7E8DA8"/>
-                </a:solidFill>
-                <a:latin typeface="Courier New" pitchFamily="34" charset="0"/>
-                <a:ea typeface="Courier New" pitchFamily="34" charset="-122"/>
-                <a:cs typeface="Courier New" pitchFamily="34" charset="-120"/>
-              </a:rPr>
-              <a:t>  사업 포인트</a:t>
-            </a:r>
-            <a:endParaRPr lang="en-US" sz="1150" dirty="0"/>
-          </a:p>
-        </p:txBody>
-      </p:sp>
-      <p:sp>
-        <p:nvSpPr>
-          <p:cNvPr id="37" name="Text 35"/>
-          <p:cNvSpPr/>
-          <p:nvPr/>
-        </p:nvSpPr>
-        <p:spPr>
-          <a:xfrm>
-            <a:off x="502920" y="4809744"/>
-            <a:ext cx="5440680" cy="1737360"/>
-          </a:xfrm>
-          <a:prstGeom prst="rect">
-            <a:avLst/>
-          </a:prstGeom>
-          <a:noFill/>
-          <a:ln/>
-        </p:spPr>
-        <p:txBody>
-          <a:bodyPr wrap="square" lIns="0" tIns="0" rIns="0" bIns="0" rtlCol="0" anchor="t"/>
-          <a:lstStyle/>
-          <a:p>
-            <a:pPr algn="l" indent="0" marL="0">
-              <a:buNone/>
-            </a:pPr>
-            <a:r>
-              <a:rPr lang="en-US" sz="1100" b="1" dirty="0">
-                <a:solidFill>
-                  <a:srgbClr val="3AC6D4"/>
-                </a:solidFill>
-                <a:latin typeface="Courier New" pitchFamily="34" charset="0"/>
-                <a:ea typeface="Courier New" pitchFamily="34" charset="-122"/>
-                <a:cs typeface="Courier New" pitchFamily="34" charset="-120"/>
-              </a:rPr>
-              <a:t>1  </a:t>
-            </a:r>
-            <a:pPr algn="l" indent="0" marL="0">
-              <a:buNone/>
-            </a:pPr>
-            <a:r>
-              <a:rPr lang="en-US" sz="1150" dirty="0">
+              <a:t>irregular demand shock</a:t>
+            </a:r>
+            <a:pPr algn="l" indent="0" marL="0">
+              <a:lnSpc>
+                <a:spcPct val="105000"/>
+              </a:lnSpc>
+              <a:buNone/>
+            </a:pPr>
+            <a:r>
+              <a:rPr lang="en-US" sz="1200" dirty="0">
                 <a:solidFill>
                   <a:srgbClr val="AEBCD4"/>
                 </a:solidFill>
@@ -2464,16 +2411,85 @@
                 <a:ea typeface="Calibri" pitchFamily="34" charset="-122"/>
                 <a:cs typeface="Calibri" pitchFamily="34" charset="-120"/>
               </a:rPr>
-              <a:t>운영비 절감 — 정확한 forecast → shortage/overflow·이동 비용↓</a:t>
+              <a:t>에 기존 예측은 취약하고, LLM/뉴스 효과는 검증 없이 과장되기 쉬움.</a:t>
+            </a:r>
+            <a:endParaRPr lang="en-US" sz="1200" dirty="0"/>
+          </a:p>
+        </p:txBody>
+      </p:sp>
+      <p:sp>
+        <p:nvSpPr>
+          <p:cNvPr id="37" name="Text 35"/>
+          <p:cNvSpPr/>
+          <p:nvPr/>
+        </p:nvSpPr>
+        <p:spPr>
+          <a:xfrm>
+            <a:off x="502920" y="4498848"/>
+            <a:ext cx="5486400" cy="274320"/>
+          </a:xfrm>
+          <a:prstGeom prst="rect">
+            <a:avLst/>
+          </a:prstGeom>
+          <a:noFill/>
+          <a:ln/>
+        </p:spPr>
+        <p:txBody>
+          <a:bodyPr wrap="square" lIns="0" tIns="0" rIns="0" bIns="0" rtlCol="0" anchor="ctr"/>
+          <a:lstStyle/>
+          <a:p>
+            <a:pPr algn="l" indent="0" marL="0">
+              <a:buNone/>
+            </a:pPr>
+            <a:r>
+              <a:rPr lang="en-US" sz="1150" b="1" spc="150" kern="0" dirty="0">
+                <a:solidFill>
+                  <a:srgbClr val="F5A02B"/>
+                </a:solidFill>
+                <a:latin typeface="Courier New" pitchFamily="34" charset="0"/>
+                <a:ea typeface="Courier New" pitchFamily="34" charset="-122"/>
+                <a:cs typeface="Courier New" pitchFamily="34" charset="-120"/>
+              </a:rPr>
+              <a:t>BUSINESS</a:t>
+            </a:r>
+            <a:pPr algn="l" indent="0" marL="0">
+              <a:buNone/>
+            </a:pPr>
+            <a:r>
+              <a:rPr lang="en-US" sz="1150" spc="150" kern="0" dirty="0">
+                <a:solidFill>
+                  <a:srgbClr val="7E8DA8"/>
+                </a:solidFill>
+                <a:latin typeface="Courier New" pitchFamily="34" charset="0"/>
+                <a:ea typeface="Courier New" pitchFamily="34" charset="-122"/>
+                <a:cs typeface="Courier New" pitchFamily="34" charset="-120"/>
+              </a:rPr>
+              <a:t>  사업 포인트</a:t>
             </a:r>
             <a:endParaRPr lang="en-US" sz="1150" dirty="0"/>
           </a:p>
-          <a:p>
-            <a:pPr algn="l" indent="0" marL="0">
-              <a:buNone/>
-            </a:pPr>
-            <a:endParaRPr lang="en-US" sz="1150" dirty="0"/>
-          </a:p>
+        </p:txBody>
+      </p:sp>
+      <p:sp>
+        <p:nvSpPr>
+          <p:cNvPr id="38" name="Text 36"/>
+          <p:cNvSpPr/>
+          <p:nvPr/>
+        </p:nvSpPr>
+        <p:spPr>
+          <a:xfrm>
+            <a:off x="502920" y="4809744"/>
+            <a:ext cx="5440680" cy="1737360"/>
+          </a:xfrm>
+          <a:prstGeom prst="rect">
+            <a:avLst/>
+          </a:prstGeom>
+          <a:noFill/>
+          <a:ln/>
+        </p:spPr>
+        <p:txBody>
+          <a:bodyPr wrap="square" lIns="0" tIns="0" rIns="0" bIns="0" rtlCol="0" anchor="t"/>
+          <a:lstStyle/>
           <a:p>
             <a:pPr algn="l" indent="0" marL="0">
               <a:buNone/>
@@ -2487,7 +2503,7 @@
                 <a:ea typeface="Courier New" pitchFamily="34" charset="-122"/>
                 <a:cs typeface="Courier New" pitchFamily="34" charset="-120"/>
               </a:rPr>
-              <a:t>2  </a:t>
+              <a:t>1  </a:t>
             </a:r>
             <a:pPr algn="l" indent="0" marL="0">
               <a:buNone/>
@@ -2501,7 +2517,7 @@
                 <a:ea typeface="Calibri" pitchFamily="34" charset="-122"/>
                 <a:cs typeface="Calibri" pitchFamily="34" charset="-120"/>
               </a:rPr>
-              <a:t>LLM 가치의 profit 환산 — LLM 비용을 제한 순가치를 측정</a:t>
+              <a:t>운영비 절감 — 정확한 forecast → shortage/overflow·이동 비용↓</a:t>
             </a:r>
             <a:endParaRPr lang="en-US" sz="1150" dirty="0"/>
           </a:p>
@@ -2524,7 +2540,7 @@
                 <a:ea typeface="Courier New" pitchFamily="34" charset="-122"/>
                 <a:cs typeface="Courier New" pitchFamily="34" charset="-120"/>
               </a:rPr>
-              <a:t>3  </a:t>
+              <a:t>2  </a:t>
             </a:r>
             <a:pPr algn="l" indent="0" marL="0">
               <a:buNone/>
@@ -2538,7 +2554,7 @@
                 <a:ea typeface="Calibri" pitchFamily="34" charset="-122"/>
                 <a:cs typeface="Calibri" pitchFamily="34" charset="-120"/>
               </a:rPr>
-              <a:t>Operator Decision Copilot — 근거 기반, 숫자 hallucination 0</a:t>
+              <a:t>LLM 가치의 profit 환산 — LLM 비용을 제한 순가치를 측정</a:t>
             </a:r>
             <a:endParaRPr lang="en-US" sz="1150" dirty="0"/>
           </a:p>
@@ -2561,7 +2577,7 @@
                 <a:ea typeface="Courier New" pitchFamily="34" charset="-122"/>
                 <a:cs typeface="Courier New" pitchFamily="34" charset="-120"/>
               </a:rPr>
-              <a:t>4  </a:t>
+              <a:t>3  </a:t>
             </a:r>
             <a:pPr algn="l" indent="0" marL="0">
               <a:buNone/>
@@ -2575,7 +2591,7 @@
                 <a:ea typeface="Calibri" pitchFamily="34" charset="-122"/>
                 <a:cs typeface="Calibri" pitchFamily="34" charset="-120"/>
               </a:rPr>
-              <a:t>Rider trip planner — 대여·반납 station + 도보 안내</a:t>
+              <a:t>Operator Decision Copilot — 근거 기반, 숫자 hallucination 0</a:t>
             </a:r>
             <a:endParaRPr lang="en-US" sz="1150" dirty="0"/>
           </a:p>
@@ -2585,81 +2601,6 @@
             </a:pPr>
             <a:endParaRPr lang="en-US" sz="1150" dirty="0"/>
           </a:p>
-        </p:txBody>
-      </p:sp>
-      <p:sp>
-        <p:nvSpPr>
-          <p:cNvPr id="38" name="Text 36"/>
-          <p:cNvSpPr/>
-          <p:nvPr/>
-        </p:nvSpPr>
-        <p:spPr>
-          <a:xfrm>
-            <a:off x="6355080" y="3127248"/>
-            <a:ext cx="5486400" cy="274320"/>
-          </a:xfrm>
-          <a:prstGeom prst="rect">
-            <a:avLst/>
-          </a:prstGeom>
-          <a:noFill/>
-          <a:ln/>
-        </p:spPr>
-        <p:txBody>
-          <a:bodyPr wrap="square" lIns="0" tIns="0" rIns="0" bIns="0" rtlCol="0" anchor="ctr"/>
-          <a:lstStyle/>
-          <a:p>
-            <a:pPr algn="l" indent="0" marL="0">
-              <a:buNone/>
-            </a:pPr>
-            <a:r>
-              <a:rPr lang="en-US" sz="1150" b="1" spc="150" kern="0" dirty="0">
-                <a:solidFill>
-                  <a:srgbClr val="F5A02B"/>
-                </a:solidFill>
-                <a:latin typeface="Courier New" pitchFamily="34" charset="0"/>
-                <a:ea typeface="Courier New" pitchFamily="34" charset="-122"/>
-                <a:cs typeface="Courier New" pitchFamily="34" charset="-120"/>
-              </a:rPr>
-              <a:t>DIFFERENTIATION</a:t>
-            </a:r>
-            <a:pPr algn="l" indent="0" marL="0">
-              <a:buNone/>
-            </a:pPr>
-            <a:r>
-              <a:rPr lang="en-US" sz="1150" spc="150" kern="0" dirty="0">
-                <a:solidFill>
-                  <a:srgbClr val="7E8DA8"/>
-                </a:solidFill>
-                <a:latin typeface="Courier New" pitchFamily="34" charset="0"/>
-                <a:ea typeface="Courier New" pitchFamily="34" charset="-122"/>
-                <a:cs typeface="Courier New" pitchFamily="34" charset="-120"/>
-              </a:rPr>
-              <a:t>  차별성</a:t>
-            </a:r>
-            <a:endParaRPr lang="en-US" sz="1150" dirty="0"/>
-          </a:p>
-        </p:txBody>
-      </p:sp>
-      <p:sp>
-        <p:nvSpPr>
-          <p:cNvPr id="39" name="Text 37"/>
-          <p:cNvSpPr/>
-          <p:nvPr/>
-        </p:nvSpPr>
-        <p:spPr>
-          <a:xfrm>
-            <a:off x="6355080" y="3438144"/>
-            <a:ext cx="5349240" cy="2194560"/>
-          </a:xfrm>
-          <a:prstGeom prst="rect">
-            <a:avLst/>
-          </a:prstGeom>
-          <a:noFill/>
-          <a:ln/>
-        </p:spPr>
-        <p:txBody>
-          <a:bodyPr wrap="square" lIns="0" tIns="0" rIns="0" bIns="0" rtlCol="0" anchor="t"/>
-          <a:lstStyle/>
           <a:p>
             <a:pPr algn="l" indent="0" marL="0">
               <a:buNone/>
@@ -2667,13 +2608,13 @@
             <a:r>
               <a:rPr lang="en-US" sz="1100" b="1" dirty="0">
                 <a:solidFill>
-                  <a:srgbClr val="F5A02B"/>
-                </a:solidFill>
-                <a:latin typeface="Courier New" pitchFamily="34" charset="0"/>
-                <a:ea typeface="Courier New" pitchFamily="34" charset="-122"/>
-                <a:cs typeface="Courier New" pitchFamily="34" charset="-120"/>
-              </a:rPr>
-              <a:t>1  </a:t>
+                  <a:srgbClr val="3AC6D4"/>
+                </a:solidFill>
+                <a:latin typeface="Courier New" pitchFamily="34" charset="0"/>
+                <a:ea typeface="Courier New" pitchFamily="34" charset="-122"/>
+                <a:cs typeface="Courier New" pitchFamily="34" charset="-120"/>
+              </a:rPr>
+              <a:t>4  </a:t>
             </a:r>
             <a:pPr algn="l" indent="0" marL="0">
               <a:buNone/>
@@ -2687,7 +2628,7 @@
                 <a:ea typeface="Calibri" pitchFamily="34" charset="-122"/>
                 <a:cs typeface="Calibri" pitchFamily="34" charset="-120"/>
               </a:rPr>
-              <a:t>End-to-end 추적성 — Article→Event→Zone→Feature→delta→action</a:t>
+              <a:t>Rider trip planner — 대여·반납 station + 도보 안내</a:t>
             </a:r>
             <a:endParaRPr lang="en-US" sz="1150" dirty="0"/>
           </a:p>
@@ -2697,6 +2638,81 @@
             </a:pPr>
             <a:endParaRPr lang="en-US" sz="1150" dirty="0"/>
           </a:p>
+        </p:txBody>
+      </p:sp>
+      <p:sp>
+        <p:nvSpPr>
+          <p:cNvPr id="39" name="Text 37"/>
+          <p:cNvSpPr/>
+          <p:nvPr/>
+        </p:nvSpPr>
+        <p:spPr>
+          <a:xfrm>
+            <a:off x="6355080" y="3127248"/>
+            <a:ext cx="5486400" cy="274320"/>
+          </a:xfrm>
+          <a:prstGeom prst="rect">
+            <a:avLst/>
+          </a:prstGeom>
+          <a:noFill/>
+          <a:ln/>
+        </p:spPr>
+        <p:txBody>
+          <a:bodyPr wrap="square" lIns="0" tIns="0" rIns="0" bIns="0" rtlCol="0" anchor="ctr"/>
+          <a:lstStyle/>
+          <a:p>
+            <a:pPr algn="l" indent="0" marL="0">
+              <a:buNone/>
+            </a:pPr>
+            <a:r>
+              <a:rPr lang="en-US" sz="1150" b="1" spc="150" kern="0" dirty="0">
+                <a:solidFill>
+                  <a:srgbClr val="F5A02B"/>
+                </a:solidFill>
+                <a:latin typeface="Courier New" pitchFamily="34" charset="0"/>
+                <a:ea typeface="Courier New" pitchFamily="34" charset="-122"/>
+                <a:cs typeface="Courier New" pitchFamily="34" charset="-120"/>
+              </a:rPr>
+              <a:t>DIFFERENTIATION</a:t>
+            </a:r>
+            <a:pPr algn="l" indent="0" marL="0">
+              <a:buNone/>
+            </a:pPr>
+            <a:r>
+              <a:rPr lang="en-US" sz="1150" spc="150" kern="0" dirty="0">
+                <a:solidFill>
+                  <a:srgbClr val="7E8DA8"/>
+                </a:solidFill>
+                <a:latin typeface="Courier New" pitchFamily="34" charset="0"/>
+                <a:ea typeface="Courier New" pitchFamily="34" charset="-122"/>
+                <a:cs typeface="Courier New" pitchFamily="34" charset="-120"/>
+              </a:rPr>
+              <a:t>  차별성</a:t>
+            </a:r>
+            <a:endParaRPr lang="en-US" sz="1150" dirty="0"/>
+          </a:p>
+        </p:txBody>
+      </p:sp>
+      <p:sp>
+        <p:nvSpPr>
+          <p:cNvPr id="40" name="Text 38"/>
+          <p:cNvSpPr/>
+          <p:nvPr/>
+        </p:nvSpPr>
+        <p:spPr>
+          <a:xfrm>
+            <a:off x="6355080" y="3438144"/>
+            <a:ext cx="5349240" cy="2194560"/>
+          </a:xfrm>
+          <a:prstGeom prst="rect">
+            <a:avLst/>
+          </a:prstGeom>
+          <a:noFill/>
+          <a:ln/>
+        </p:spPr>
+        <p:txBody>
+          <a:bodyPr wrap="square" lIns="0" tIns="0" rIns="0" bIns="0" rtlCol="0" anchor="t"/>
+          <a:lstStyle/>
           <a:p>
             <a:pPr algn="l" indent="0" marL="0">
               <a:buNone/>
@@ -2710,7 +2726,7 @@
                 <a:ea typeface="Courier New" pitchFamily="34" charset="-122"/>
                 <a:cs typeface="Courier New" pitchFamily="34" charset="-120"/>
               </a:rPr>
-              <a:t>2  </a:t>
+              <a:t>1  </a:t>
             </a:r>
             <a:pPr algn="l" indent="0" marL="0">
               <a:buNone/>
@@ -2724,7 +2740,7 @@
                 <a:ea typeface="Calibri" pitchFamily="34" charset="-122"/>
                 <a:cs typeface="Calibri" pitchFamily="34" charset="-120"/>
               </a:rPr>
-              <a:t>Temporal correctness — available_at ≤ cutoff, leakage 방지</a:t>
+              <a:t>End-to-end 추적성 — Article→Event→Zone→Feature→delta→action</a:t>
             </a:r>
             <a:endParaRPr lang="en-US" sz="1150" dirty="0"/>
           </a:p>
@@ -2747,7 +2763,7 @@
                 <a:ea typeface="Courier New" pitchFamily="34" charset="-122"/>
                 <a:cs typeface="Courier New" pitchFamily="34" charset="-120"/>
               </a:rPr>
-              <a:t>3  </a:t>
+              <a:t>2  </a:t>
             </a:r>
             <a:pPr algn="l" indent="0" marL="0">
               <a:buNone/>
@@ -2761,7 +2777,7 @@
                 <a:ea typeface="Calibri" pitchFamily="34" charset="-122"/>
                 <a:cs typeface="Calibri" pitchFamily="34" charset="-120"/>
               </a:rPr>
-              <a:t>Honesty 계약 — claim_status + ResultEnvelope, null도 정직 보고</a:t>
+              <a:t>Temporal correctness — available_at ≤ cutoff, leakage 방지</a:t>
             </a:r>
             <a:endParaRPr lang="en-US" sz="1150" dirty="0"/>
           </a:p>
@@ -2784,7 +2800,7 @@
                 <a:ea typeface="Courier New" pitchFamily="34" charset="-122"/>
                 <a:cs typeface="Courier New" pitchFamily="34" charset="-120"/>
               </a:rPr>
-              <a:t>4  </a:t>
+              <a:t>3  </a:t>
             </a:r>
             <a:pPr algn="l" indent="0" marL="0">
               <a:buNone/>
@@ -2798,7 +2814,7 @@
                 <a:ea typeface="Calibri" pitchFamily="34" charset="-122"/>
                 <a:cs typeface="Calibri" pitchFamily="34" charset="-120"/>
               </a:rPr>
-              <a:t>LLM 경계 — 숫자는 typed tool에서만 (LLM은 구조화·설명만)</a:t>
+              <a:t>Honesty 계약 — claim_status + ResultEnvelope, null도 정직 보고</a:t>
             </a:r>
             <a:endParaRPr lang="en-US" sz="1150" dirty="0"/>
           </a:p>
@@ -2821,7 +2837,7 @@
                 <a:ea typeface="Courier New" pitchFamily="34" charset="-122"/>
                 <a:cs typeface="Courier New" pitchFamily="34" charset="-120"/>
               </a:rPr>
-              <a:t>5  </a:t>
+              <a:t>4  </a:t>
             </a:r>
             <a:pPr algn="l" indent="0" marL="0">
               <a:buNone/>
@@ -2835,6 +2851,43 @@
                 <a:ea typeface="Calibri" pitchFamily="34" charset="-122"/>
                 <a:cs typeface="Calibri" pitchFamily="34" charset="-120"/>
               </a:rPr>
+              <a:t>LLM 경계 — 숫자는 typed tool에서만 (LLM은 구조화·설명만)</a:t>
+            </a:r>
+            <a:endParaRPr lang="en-US" sz="1150" dirty="0"/>
+          </a:p>
+          <a:p>
+            <a:pPr algn="l" indent="0" marL="0">
+              <a:buNone/>
+            </a:pPr>
+            <a:endParaRPr lang="en-US" sz="1150" dirty="0"/>
+          </a:p>
+          <a:p>
+            <a:pPr algn="l" indent="0" marL="0">
+              <a:buNone/>
+            </a:pPr>
+            <a:r>
+              <a:rPr lang="en-US" sz="1100" b="1" dirty="0">
+                <a:solidFill>
+                  <a:srgbClr val="F5A02B"/>
+                </a:solidFill>
+                <a:latin typeface="Courier New" pitchFamily="34" charset="0"/>
+                <a:ea typeface="Courier New" pitchFamily="34" charset="-122"/>
+                <a:cs typeface="Courier New" pitchFamily="34" charset="-120"/>
+              </a:rPr>
+              <a:t>5  </a:t>
+            </a:r>
+            <a:pPr algn="l" indent="0" marL="0">
+              <a:buNone/>
+            </a:pPr>
+            <a:r>
+              <a:rPr lang="en-US" sz="1150" dirty="0">
+                <a:solidFill>
+                  <a:srgbClr val="AEBCD4"/>
+                </a:solidFill>
+                <a:latin typeface="Calibri" pitchFamily="34" charset="0"/>
+                <a:ea typeface="Calibri" pitchFamily="34" charset="-122"/>
+                <a:cs typeface="Calibri" pitchFamily="34" charset="-120"/>
+              </a:rPr>
               <a:t>Graph 실기여 — Neo4j event feature가 forecasting에 사용</a:t>
             </a:r>
             <a:endParaRPr lang="en-US" sz="1150" dirty="0"/>
@@ -2849,7 +2902,7 @@
       </p:sp>
       <p:sp>
         <p:nvSpPr>
-          <p:cNvPr id="40" name="Shape 38"/>
+          <p:cNvPr id="41" name="Shape 39"/>
           <p:cNvSpPr/>
           <p:nvPr/>
         </p:nvSpPr>
@@ -2876,7 +2929,7 @@
       </p:sp>
       <p:sp>
         <p:nvSpPr>
-          <p:cNvPr id="41" name="Text 39"/>
+          <p:cNvPr id="42" name="Text 40"/>
           <p:cNvSpPr/>
           <p:nvPr/>
         </p:nvSpPr>
@@ -2955,7 +3008,7 @@
       </p:sp>
       <p:sp>
         <p:nvSpPr>
-          <p:cNvPr id="42" name="Text 40"/>
+          <p:cNvPr id="43" name="Text 41"/>
           <p:cNvSpPr/>
           <p:nvPr/>
         </p:nvSpPr>
@@ -2994,7 +3047,7 @@
       </p:sp>
       <p:sp>
         <p:nvSpPr>
-          <p:cNvPr id="43" name="Text 41"/>
+          <p:cNvPr id="44" name="Text 42"/>
           <p:cNvSpPr/>
           <p:nvPr/>
         </p:nvSpPr>
